--- a/presentations/06-asm-state-and-input/06-asm-state-and-input-lecture.pptx
+++ b/presentations/06-asm-state-and-input/06-asm-state-and-input-lecture.pptx
@@ -139,7 +139,7 @@
   <p:extLst>
     <p:ext uri="{521415D9-36F7-43E2-AB2F-B90AF26B5E84}">
       <p14:sectionLst xmlns:p14="http://schemas.microsoft.com/office/powerpoint/2010/main">
-        <p14:section name="Opening" id="{be07230f-17e7-7462-fa52-81daf7ee1528}">
+        <p14:section name="Opening" id="{a8749af9-0bad-fe70-406c-bb665cefda1b}">
           <p14:sldIdLst>
             <p14:sldId id="256"/>
             <p14:sldId id="257"/>
@@ -155,7 +155,7 @@
             <p14:sldId id="267"/>
           </p14:sldIdLst>
         </p14:section>
-        <p14:section name="Reading the controller" id="{066d889b-b4b2-5ef4-07ad-11e8ec71cb55}">
+        <p14:section name="Reading the controller" id="{fde34ff6-0363-6a86-efb9-414ecc9079cf}">
           <p14:sldIdLst>
             <p14:sldId id="268"/>
             <p14:sldId id="269"/>
@@ -166,7 +166,7 @@
             <p14:sldId id="274"/>
           </p14:sldIdLst>
         </p14:section>
-        <p14:section name="Moving an object" id="{673ee5b2-eab0-d7b9-b236-5741374f1219}">
+        <p14:section name="Moving an object" id="{78d22e46-f1eb-d1cb-b3c0-7824025ed1b8}">
           <p14:sldIdLst>
             <p14:sldId id="275"/>
             <p14:sldId id="276"/>
@@ -174,7 +174,7 @@
             <p14:sldId id="278"/>
           </p14:sldIdLst>
         </p14:section>
-        <p14:section name="The boundary clamp" id="{9d9a1615-9800-fcc1-eeb8-0620f3dda413}">
+        <p14:section name="The boundary clamp" id="{04a1620d-ac65-dc57-a9c1-ad54f4fdac96}">
           <p14:sldIdLst>
             <p14:sldId id="279"/>
             <p14:sldId id="280"/>
@@ -183,7 +183,7 @@
             <p14:sldId id="283"/>
           </p14:sldIdLst>
         </p14:section>
-        <p14:section name="Debugging" id="{1263db48-0b0a-ab39-a11c-528a1b0cac85}">
+        <p14:section name="Debugging" id="{abfaac95-46de-4ebe-7bbe-47ea434f5a0d}">
           <p14:sldIdLst>
             <p14:sldId id="284"/>
             <p14:sldId id="285"/>
@@ -191,7 +191,7 @@
             <p14:sldId id="287"/>
           </p14:sldIdLst>
         </p14:section>
-        <p14:section name="Closing" id="{04bfbc40-04d3-a468-1392-2e5b99afef6c}">
+        <p14:section name="Closing" id="{589e9176-7293-bbe8-d12b-8c7a39a7c628}">
           <p14:sldIdLst>
             <p14:sldId id="288"/>
           </p14:sldIdLst>
